--- a/brain/library/internal/one-pagers/Premium Pest Management April 2026.pptx
+++ b/brain/library/internal/one-pagers/Premium Pest Management April 2026.pptx
@@ -15041,7 +15041,7 @@
                             <a:srgbClr val="000000"/>
                           </a:solidFill>
                         </a:rPr>
-                        <a:t>Premium Pest Management for Luxury Hospitality &amp; Food Service | April 2026</a:t>
+                        <a:t>Premium Pest Management (Luxury Hospitality &amp; Commercial Properties) | April 2026</a:t>
                       </a:r>
                       <a:endParaRPr sz="1400" u="none" cap="none" strike="noStrike"/>
                     </a:p>
@@ -15088,7 +15088,12 @@
                     </a:solidFill>
                   </a:tcPr>
                 </a:tc>
-                <a:tc hMerge="1"/>
+                <a:tc hMerge="1">
+                  <a:txBody>
+                    <a:bodyPr/>
+                    <a:p/>
+                  </a:txBody>
+                </a:tc>
               </a:tr>
               <a:tr h="299125">
                 <a:tc>
